--- a/deck/カンツギ_事業計画書_10分16枚版.pptx
+++ b/deck/カンツギ_事業計画書_10分16枚版.pptx
@@ -3004,48 +3004,6 @@
           </a:p>
         </p:txBody>
       </p:sp>
-      <p:sp>
-        <p:nvSpPr>
-          <p:cNvPr id="8" name="Text 4"/>
-          <p:cNvSpPr txBox="1"/>
-          <p:nvPr/>
-        </p:nvSpPr>
-        <p:spPr>
-          <a:xfrm>
-            <a:off x="5029200" y="3840480"/>
-            <a:ext cx="3566160" cy="548640"/>
-          </a:xfrm>
-          <a:prstGeom prst="rect">
-            <a:avLst/>
-          </a:prstGeom>
-          <a:noFill/>
-          <a:ln/>
-        </p:spPr>
-        <p:txBody>
-          <a:bodyPr wrap="square" lIns="0" tIns="0" rIns="0" bIns="0" rtlCol="0" anchor="ctr"/>
-          <a:lstStyle/>
-          <a:p>
-            <a:pPr algn="l" indent="0" marL="0">
-              <a:lnSpc>
-                <a:spcPct val="110000"/>
-              </a:lnSpc>
-              <a:buNone/>
-            </a:pPr>
-            <a:r>
-              <a:rPr lang="en-US" sz="1600" dirty="0">
-                <a:solidFill>
-                  <a:srgbClr val="FFFFFF"/>
-                </a:solidFill>
-                <a:latin typeface="Meiryo" pitchFamily="34" charset="0"/>
-                <a:ea typeface="Meiryo" pitchFamily="34" charset="-122"/>
-                <a:cs typeface="Meiryo" pitchFamily="34" charset="-120"/>
-              </a:rPr>
-              <a:t>発表者：＿＿＿＿＿＿</a:t>
-            </a:r>
-            <a:endParaRPr lang="en-US" sz="1600" dirty="0"/>
-          </a:p>
-        </p:txBody>
-      </p:sp>
     </p:spTree>
   </p:cSld>
   <p:clrMapOvr>

--- a/deck/カンツギ_事業計画書_10分16枚版.pptx
+++ b/deck/カンツギ_事業計画書_10分16枚版.pptx
@@ -1539,7 +1539,7 @@
               <a:rPr lang="en-US" dirty="0"/>
               <a:t>【8:20 - 8:55】
 要約：締め
-最後に、私の願いです。10年続けば、書類に使っていた約137万時間が、現場と若手の指導に戻ります。私にとって、利益は目的ではなく、続けるための条件です。配当は求めません。共感してくれる会社や職人さんと一緒に、育てていきたい。日本の現場の勘を、次の担い手へ。その最初の一歩として、6か月で、最初の1拠点を動かします。ありがとうございました。</a:t>
+最後に、私の願いです。10年続けば、書類に使っていた約137万時間が、現場と若手の指導に戻ります。私にとって、利益は目的ではなく、続けるための条件です。配当は求めません。共感してくれる会社や職人さんと一緒に、育てていきたい。日本の現場の勘を、次の担い手へ。その最初の一歩として、6か月で、最初の1拠点を動かします。ご清聴ありがとうございました。</a:t>
             </a:r>
             <a:endParaRPr lang="en-US" dirty="0"/>
           </a:p>

--- a/deck/カンツギ_事業計画書_10分16枚版.pptx
+++ b/deck/カンツギ_事業計画書_10分16枚版.pptx
@@ -1539,7 +1539,7 @@
               <a:rPr lang="en-US" dirty="0"/>
               <a:t>【8:20 - 8:55】
 要約：締め
-最後に、私の願いです。10年続けば、書類に使っていた約137万時間が、現場と若手の指導に戻ります。私にとって、利益は目的ではなく、続けるための条件です。配当は求めません。共感してくれる会社や職人さんと一緒に、育てていきたい。日本の現場の勘を、次の担い手へ。その最初の一歩として、6か月で、最初の1拠点を動かします。ご清聴ありがとうございました。</a:t>
+最後に、私の願いです。10年続けば、書類に使っていた約137万時間が、現場と若手の指導に戻ります。私にとって、利益は目的ではなく、続けるための条件です。配当は求めません。共感してくれる会社や職人さんと一緒に、育てていきたい。日本の現場の勘を次の担い手へ。その最初の一歩として、6か月で、最初の1拠点を動かします。ご清聴ありがとうございました。</a:t>
             </a:r>
             <a:endParaRPr lang="en-US" dirty="0"/>
           </a:p>
@@ -2169,7 +2169,7 @@
               <a:rPr lang="en-US" dirty="0"/>
               <a:t>【3:55 - 4:30】
 要約：経営理念
-経営理念は、「現場の勘を、次の担い手へ。」です。ホームページでも、最初にこの言葉を出します。大事にしたいことは三つ。現場を主役にすること。入力の手間は増やしません。勘に敬意を払うこと。記録は本人の同意のもとで、誰の技術かを残します。そして、数字で約束すること。効果は毎月測って見せます。特に現場の方には、これは監視じゃない、あなたの技術を残す仕組みだ、と伝えたいです。</a:t>
+経営理念は、「現場の勘を次の担い手へ」です。ホームページでも、最初にこの言葉を出します。大事にしたいことは三つ。現場を主役にすること。入力の手間は増やしません。勘に敬意を払うこと。記録は本人の同意のもとで、誰の技術かを残します。そして、数字で約束すること。効果は毎月測って見せます。特に現場の方には、これは監視じゃない、あなたの技術を残す仕組みだ、と伝えたいです。</a:t>
             </a:r>
             <a:endParaRPr lang="en-US" dirty="0"/>
           </a:p>
@@ -2871,7 +2871,7 @@
                 <a:ea typeface="Meiryo" pitchFamily="34" charset="-122"/>
                 <a:cs typeface="Meiryo" pitchFamily="34" charset="-120"/>
               </a:rPr>
-              <a:t>現場の勘を、</a:t>
+              <a:t>現場の勘を</a:t>
             </a:r>
             <a:endParaRPr lang="en-US" sz="5400" dirty="0"/>
           </a:p>
@@ -2894,7 +2894,7 @@
                 <a:ea typeface="Meiryo" pitchFamily="34" charset="-122"/>
                 <a:cs typeface="Meiryo" pitchFamily="34" charset="-120"/>
               </a:rPr>
-              <a:t>次の担い手へ。</a:t>
+              <a:t>次の担い手へ</a:t>
             </a:r>
             <a:endParaRPr lang="en-US" sz="5400" dirty="0"/>
           </a:p>
@@ -8817,7 +8817,7 @@
                 <a:ea typeface="Meiryo" pitchFamily="34" charset="-122"/>
                 <a:cs typeface="Meiryo" pitchFamily="34" charset="-120"/>
               </a:rPr>
-              <a:t>日本の現場の勘を、次の担い手へ。最初の一歩として、6か月で1拠点を動かします。</a:t>
+              <a:t>日本の現場の勘を次の担い手へ。最初の一歩として、6か月で1拠点を動かします。</a:t>
             </a:r>
             <a:endParaRPr lang="en-US" sz="1700" dirty="0"/>
           </a:p>
@@ -13816,7 +13816,7 @@
                 <a:ea typeface="Meiryo" pitchFamily="34" charset="-122"/>
                 <a:cs typeface="Meiryo" pitchFamily="34" charset="-120"/>
               </a:rPr>
-              <a:t>現場の勘を、</a:t>
+              <a:t>現場の勘を</a:t>
             </a:r>
             <a:endParaRPr lang="en-US" sz="4600" dirty="0"/>
           </a:p>
@@ -13836,7 +13836,7 @@
                 <a:ea typeface="Meiryo" pitchFamily="34" charset="-122"/>
                 <a:cs typeface="Meiryo" pitchFamily="34" charset="-120"/>
               </a:rPr>
-              <a:t>次の担い手へ。</a:t>
+              <a:t>次の担い手へ</a:t>
             </a:r>
             <a:endParaRPr lang="en-US" sz="4600" dirty="0"/>
           </a:p>
